--- a/DEV-1-16/for_students/DAY-1/ppt/dev1_01.pptx
+++ b/DEV-1-16/for_students/DAY-1/ppt/dev1_01.pptx
@@ -124,7 +124,7 @@
 </file>
 
 <file path=ppt/slideLayouts/slideLayout1.xml><?xml version="1.0" encoding="utf-8"?>
-<p:sldLayout xmlns:a="http://schemas.openxmlformats.org/drawingml/2006/main" xmlns:r="http://schemas.openxmlformats.org/officeDocument/2006/relationships" xmlns:p="http://schemas.openxmlformats.org/presentationml/2006/main" type="title" preserve="1">
+<p:sldLayout xmlns:a="http://schemas.openxmlformats.org/drawingml/2006/main" xmlns:r="http://schemas.openxmlformats.org/officeDocument/2006/relationships" xmlns:p="http://schemas.openxmlformats.org/presentationml/2006/main" showMasterSp="0" type="title" preserve="1">
   <p:cSld name="Титульный слайд">
     <p:spTree>
       <p:nvGrpSpPr>
@@ -270,7 +270,7 @@
           <a:p>
             <a:fld id="{EF790F8C-5FB9-4EFE-BCC7-F735A3026FD8}" type="datetimeFigureOut">
               <a:rPr lang="ru-RU" smtClean="0"/>
-              <a:t>19.09.2024</a:t>
+              <a:t>04.12.2025</a:t>
             </a:fld>
             <a:endParaRPr lang="ru-RU"/>
           </a:p>
@@ -344,7 +344,7 @@
 </file>
 
 <file path=ppt/slideLayouts/slideLayout10.xml><?xml version="1.0" encoding="utf-8"?>
-<p:sldLayout xmlns:a="http://schemas.openxmlformats.org/drawingml/2006/main" xmlns:r="http://schemas.openxmlformats.org/officeDocument/2006/relationships" xmlns:p="http://schemas.openxmlformats.org/presentationml/2006/main" type="vertTx" preserve="1">
+<p:sldLayout xmlns:a="http://schemas.openxmlformats.org/drawingml/2006/main" xmlns:r="http://schemas.openxmlformats.org/officeDocument/2006/relationships" xmlns:p="http://schemas.openxmlformats.org/presentationml/2006/main" showMasterSp="0" type="vertTx" preserve="1">
   <p:cSld name="Заголовок и вертикальный текст">
     <p:spTree>
       <p:nvGrpSpPr>
@@ -468,7 +468,7 @@
           <a:p>
             <a:fld id="{EF790F8C-5FB9-4EFE-BCC7-F735A3026FD8}" type="datetimeFigureOut">
               <a:rPr lang="ru-RU" smtClean="0"/>
-              <a:t>19.09.2024</a:t>
+              <a:t>04.12.2025</a:t>
             </a:fld>
             <a:endParaRPr lang="ru-RU"/>
           </a:p>
@@ -542,7 +542,7 @@
 </file>
 
 <file path=ppt/slideLayouts/slideLayout11.xml><?xml version="1.0" encoding="utf-8"?>
-<p:sldLayout xmlns:a="http://schemas.openxmlformats.org/drawingml/2006/main" xmlns:r="http://schemas.openxmlformats.org/officeDocument/2006/relationships" xmlns:p="http://schemas.openxmlformats.org/presentationml/2006/main" type="vertTitleAndTx" preserve="1">
+<p:sldLayout xmlns:a="http://schemas.openxmlformats.org/drawingml/2006/main" xmlns:r="http://schemas.openxmlformats.org/officeDocument/2006/relationships" xmlns:p="http://schemas.openxmlformats.org/presentationml/2006/main" showMasterSp="0" type="vertTitleAndTx" preserve="1">
   <p:cSld name="Вертикальный заголовок и текст">
     <p:spTree>
       <p:nvGrpSpPr>
@@ -676,7 +676,7 @@
           <a:p>
             <a:fld id="{EF790F8C-5FB9-4EFE-BCC7-F735A3026FD8}" type="datetimeFigureOut">
               <a:rPr lang="ru-RU" smtClean="0"/>
-              <a:t>19.09.2024</a:t>
+              <a:t>04.12.2025</a:t>
             </a:fld>
             <a:endParaRPr lang="ru-RU"/>
           </a:p>
@@ -750,7 +750,7 @@
 </file>
 
 <file path=ppt/slideLayouts/slideLayout12.xml><?xml version="1.0" encoding="utf-8"?>
-<p:sldLayout xmlns:a="http://schemas.openxmlformats.org/drawingml/2006/main" xmlns:r="http://schemas.openxmlformats.org/officeDocument/2006/relationships" xmlns:p="http://schemas.openxmlformats.org/presentationml/2006/main" type="blank" preserve="1">
+<p:sldLayout xmlns:a="http://schemas.openxmlformats.org/drawingml/2006/main" xmlns:r="http://schemas.openxmlformats.org/officeDocument/2006/relationships" xmlns:p="http://schemas.openxmlformats.org/presentationml/2006/main" showMasterSp="0" type="blank" preserve="1">
   <p:cSld name="Blank Slide">
     <p:spTree>
       <p:nvGrpSpPr>
@@ -780,7 +780,7 @@
 </file>
 
 <file path=ppt/slideLayouts/slideLayout13.xml><?xml version="1.0" encoding="utf-8"?>
-<p:sldLayout xmlns:a="http://schemas.openxmlformats.org/drawingml/2006/main" xmlns:r="http://schemas.openxmlformats.org/officeDocument/2006/relationships" xmlns:p="http://schemas.openxmlformats.org/presentationml/2006/main" type="tx" preserve="1">
+<p:sldLayout xmlns:a="http://schemas.openxmlformats.org/drawingml/2006/main" xmlns:r="http://schemas.openxmlformats.org/officeDocument/2006/relationships" xmlns:p="http://schemas.openxmlformats.org/presentationml/2006/main" showMasterSp="0" type="tx" preserve="1">
   <p:cSld name="Title Slide">
     <p:spTree>
       <p:nvGrpSpPr>
@@ -876,7 +876,7 @@
 </file>
 
 <file path=ppt/slideLayouts/slideLayout14.xml><?xml version="1.0" encoding="utf-8"?>
-<p:sldLayout xmlns:a="http://schemas.openxmlformats.org/drawingml/2006/main" xmlns:r="http://schemas.openxmlformats.org/officeDocument/2006/relationships" xmlns:p="http://schemas.openxmlformats.org/presentationml/2006/main" type="obj" preserve="1">
+<p:sldLayout xmlns:a="http://schemas.openxmlformats.org/drawingml/2006/main" xmlns:r="http://schemas.openxmlformats.org/officeDocument/2006/relationships" xmlns:p="http://schemas.openxmlformats.org/presentationml/2006/main" showMasterSp="0" type="obj" preserve="1">
   <p:cSld name="Title, Content">
     <p:spTree>
       <p:nvGrpSpPr>
@@ -974,7 +974,7 @@
 </file>
 
 <file path=ppt/slideLayouts/slideLayout15.xml><?xml version="1.0" encoding="utf-8"?>
-<p:sldLayout xmlns:a="http://schemas.openxmlformats.org/drawingml/2006/main" xmlns:r="http://schemas.openxmlformats.org/officeDocument/2006/relationships" xmlns:p="http://schemas.openxmlformats.org/presentationml/2006/main" type="twoObj" preserve="1">
+<p:sldLayout xmlns:a="http://schemas.openxmlformats.org/drawingml/2006/main" xmlns:r="http://schemas.openxmlformats.org/officeDocument/2006/relationships" xmlns:p="http://schemas.openxmlformats.org/presentationml/2006/main" showMasterSp="0" type="twoObj" preserve="1">
   <p:cSld name="Title, 2 Content">
     <p:spTree>
       <p:nvGrpSpPr>
@@ -1106,7 +1106,7 @@
 </file>
 
 <file path=ppt/slideLayouts/slideLayout16.xml><?xml version="1.0" encoding="utf-8"?>
-<p:sldLayout xmlns:a="http://schemas.openxmlformats.org/drawingml/2006/main" xmlns:r="http://schemas.openxmlformats.org/officeDocument/2006/relationships" xmlns:p="http://schemas.openxmlformats.org/presentationml/2006/main" type="titleOnly" preserve="1">
+<p:sldLayout xmlns:a="http://schemas.openxmlformats.org/drawingml/2006/main" xmlns:r="http://schemas.openxmlformats.org/officeDocument/2006/relationships" xmlns:p="http://schemas.openxmlformats.org/presentationml/2006/main" showMasterSp="0" type="titleOnly" preserve="1">
   <p:cSld name="Title Only">
     <p:spTree>
       <p:nvGrpSpPr>
@@ -1170,7 +1170,7 @@
 </file>
 
 <file path=ppt/slideLayouts/slideLayout17.xml><?xml version="1.0" encoding="utf-8"?>
-<p:sldLayout xmlns:a="http://schemas.openxmlformats.org/drawingml/2006/main" xmlns:r="http://schemas.openxmlformats.org/officeDocument/2006/relationships" xmlns:p="http://schemas.openxmlformats.org/presentationml/2006/main" type="objOnly" preserve="1">
+<p:sldLayout xmlns:a="http://schemas.openxmlformats.org/drawingml/2006/main" xmlns:r="http://schemas.openxmlformats.org/officeDocument/2006/relationships" xmlns:p="http://schemas.openxmlformats.org/presentationml/2006/main" showMasterSp="0" type="objOnly" preserve="1">
   <p:cSld name="Centered Text">
     <p:spTree>
       <p:nvGrpSpPr>
@@ -1232,7 +1232,7 @@
 </file>
 
 <file path=ppt/slideLayouts/slideLayout18.xml><?xml version="1.0" encoding="utf-8"?>
-<p:sldLayout xmlns:a="http://schemas.openxmlformats.org/drawingml/2006/main" xmlns:r="http://schemas.openxmlformats.org/officeDocument/2006/relationships" xmlns:p="http://schemas.openxmlformats.org/presentationml/2006/main" type="twoObjAndObj" preserve="1">
+<p:sldLayout xmlns:a="http://schemas.openxmlformats.org/drawingml/2006/main" xmlns:r="http://schemas.openxmlformats.org/officeDocument/2006/relationships" xmlns:p="http://schemas.openxmlformats.org/presentationml/2006/main" showMasterSp="0" type="twoObjAndObj" preserve="1">
   <p:cSld name="Title, 2 Content and Content">
     <p:spTree>
       <p:nvGrpSpPr>
@@ -1398,7 +1398,7 @@
 </file>
 
 <file path=ppt/slideLayouts/slideLayout19.xml><?xml version="1.0" encoding="utf-8"?>
-<p:sldLayout xmlns:a="http://schemas.openxmlformats.org/drawingml/2006/main" xmlns:r="http://schemas.openxmlformats.org/officeDocument/2006/relationships" xmlns:p="http://schemas.openxmlformats.org/presentationml/2006/main" type="objAndTwoObj" preserve="1">
+<p:sldLayout xmlns:a="http://schemas.openxmlformats.org/drawingml/2006/main" xmlns:r="http://schemas.openxmlformats.org/officeDocument/2006/relationships" xmlns:p="http://schemas.openxmlformats.org/presentationml/2006/main" showMasterSp="0" type="objAndTwoObj" preserve="1">
   <p:cSld name="Title Content and 2 Content">
     <p:spTree>
       <p:nvGrpSpPr>
@@ -1564,7 +1564,7 @@
 </file>
 
 <file path=ppt/slideLayouts/slideLayout2.xml><?xml version="1.0" encoding="utf-8"?>
-<p:sldLayout xmlns:a="http://schemas.openxmlformats.org/drawingml/2006/main" xmlns:r="http://schemas.openxmlformats.org/officeDocument/2006/relationships" xmlns:p="http://schemas.openxmlformats.org/presentationml/2006/main" type="obj" preserve="1">
+<p:sldLayout xmlns:a="http://schemas.openxmlformats.org/drawingml/2006/main" xmlns:r="http://schemas.openxmlformats.org/officeDocument/2006/relationships" xmlns:p="http://schemas.openxmlformats.org/presentationml/2006/main" showMasterSp="0" type="obj" preserve="1">
   <p:cSld name="Заголовок и объект">
     <p:spTree>
       <p:nvGrpSpPr>
@@ -1688,7 +1688,7 @@
           <a:p>
             <a:fld id="{EF790F8C-5FB9-4EFE-BCC7-F735A3026FD8}" type="datetimeFigureOut">
               <a:rPr lang="ru-RU" smtClean="0"/>
-              <a:t>19.09.2024</a:t>
+              <a:t>04.12.2025</a:t>
             </a:fld>
             <a:endParaRPr lang="ru-RU"/>
           </a:p>
@@ -1762,7 +1762,7 @@
 </file>
 
 <file path=ppt/slideLayouts/slideLayout20.xml><?xml version="1.0" encoding="utf-8"?>
-<p:sldLayout xmlns:a="http://schemas.openxmlformats.org/drawingml/2006/main" xmlns:r="http://schemas.openxmlformats.org/officeDocument/2006/relationships" xmlns:p="http://schemas.openxmlformats.org/presentationml/2006/main" type="twoObjOverTx" preserve="1">
+<p:sldLayout xmlns:a="http://schemas.openxmlformats.org/drawingml/2006/main" xmlns:r="http://schemas.openxmlformats.org/officeDocument/2006/relationships" xmlns:p="http://schemas.openxmlformats.org/presentationml/2006/main" showMasterSp="0" type="twoObjOverTx" preserve="1">
   <p:cSld name="Title, 2 Content over Content">
     <p:spTree>
       <p:nvGrpSpPr>
@@ -1928,7 +1928,7 @@
 </file>
 
 <file path=ppt/slideLayouts/slideLayout21.xml><?xml version="1.0" encoding="utf-8"?>
-<p:sldLayout xmlns:a="http://schemas.openxmlformats.org/drawingml/2006/main" xmlns:r="http://schemas.openxmlformats.org/officeDocument/2006/relationships" xmlns:p="http://schemas.openxmlformats.org/presentationml/2006/main" type="objOverTx" preserve="1">
+<p:sldLayout xmlns:a="http://schemas.openxmlformats.org/drawingml/2006/main" xmlns:r="http://schemas.openxmlformats.org/officeDocument/2006/relationships" xmlns:p="http://schemas.openxmlformats.org/presentationml/2006/main" showMasterSp="0" type="objOverTx" preserve="1">
   <p:cSld name="Title, Content over Content">
     <p:spTree>
       <p:nvGrpSpPr>
@@ -2060,7 +2060,7 @@
 </file>
 
 <file path=ppt/slideLayouts/slideLayout22.xml><?xml version="1.0" encoding="utf-8"?>
-<p:sldLayout xmlns:a="http://schemas.openxmlformats.org/drawingml/2006/main" xmlns:r="http://schemas.openxmlformats.org/officeDocument/2006/relationships" xmlns:p="http://schemas.openxmlformats.org/presentationml/2006/main" type="fourObj" preserve="1">
+<p:sldLayout xmlns:a="http://schemas.openxmlformats.org/drawingml/2006/main" xmlns:r="http://schemas.openxmlformats.org/officeDocument/2006/relationships" xmlns:p="http://schemas.openxmlformats.org/presentationml/2006/main" showMasterSp="0" type="fourObj" preserve="1">
   <p:cSld name="Title, 4 Content">
     <p:spTree>
       <p:nvGrpSpPr>
@@ -2260,7 +2260,7 @@
 </file>
 
 <file path=ppt/slideLayouts/slideLayout23.xml><?xml version="1.0" encoding="utf-8"?>
-<p:sldLayout xmlns:a="http://schemas.openxmlformats.org/drawingml/2006/main" xmlns:r="http://schemas.openxmlformats.org/officeDocument/2006/relationships" xmlns:p="http://schemas.openxmlformats.org/presentationml/2006/main" type="blank" preserve="1">
+<p:sldLayout xmlns:a="http://schemas.openxmlformats.org/drawingml/2006/main" xmlns:r="http://schemas.openxmlformats.org/officeDocument/2006/relationships" xmlns:p="http://schemas.openxmlformats.org/presentationml/2006/main" showMasterSp="0" type="blank" preserve="1">
   <p:cSld name="Title, 6 Content">
     <p:spTree>
       <p:nvGrpSpPr>
@@ -2653,7 +2653,7 @@
 </file>
 
 <file path=ppt/slideLayouts/slideLayout25.xml><?xml version="1.0" encoding="utf-8"?>
-<p:sldLayout xmlns:a="http://schemas.openxmlformats.org/drawingml/2006/main" xmlns:r="http://schemas.openxmlformats.org/officeDocument/2006/relationships" xmlns:p="http://schemas.openxmlformats.org/presentationml/2006/main" type="title">
+<p:sldLayout xmlns:a="http://schemas.openxmlformats.org/drawingml/2006/main" xmlns:r="http://schemas.openxmlformats.org/officeDocument/2006/relationships" xmlns:p="http://schemas.openxmlformats.org/presentationml/2006/main" showMasterSp="0" type="title">
   <p:cSld name="Титульный слайд">
     <p:spTree>
       <p:nvGrpSpPr>
@@ -2799,7 +2799,7 @@
           <a:p>
             <a:fld id="{EF790F8C-5FB9-4EFE-BCC7-F735A3026FD8}" type="datetimeFigureOut">
               <a:rPr lang="ru-RU" smtClean="0"/>
-              <a:t>19.09.2024</a:t>
+              <a:t>04.12.2025</a:t>
             </a:fld>
             <a:endParaRPr lang="ru-RU"/>
           </a:p>
@@ -2873,7 +2873,7 @@
 </file>
 
 <file path=ppt/slideLayouts/slideLayout3.xml><?xml version="1.0" encoding="utf-8"?>
-<p:sldLayout xmlns:a="http://schemas.openxmlformats.org/drawingml/2006/main" xmlns:r="http://schemas.openxmlformats.org/officeDocument/2006/relationships" xmlns:p="http://schemas.openxmlformats.org/presentationml/2006/main" type="secHead" preserve="1">
+<p:sldLayout xmlns:a="http://schemas.openxmlformats.org/drawingml/2006/main" xmlns:r="http://schemas.openxmlformats.org/officeDocument/2006/relationships" xmlns:p="http://schemas.openxmlformats.org/presentationml/2006/main" showMasterSp="0" type="secHead" preserve="1">
   <p:cSld name="Заголовок раздела">
     <p:spTree>
       <p:nvGrpSpPr>
@@ -3074,7 +3074,7 @@
           <a:p>
             <a:fld id="{EF790F8C-5FB9-4EFE-BCC7-F735A3026FD8}" type="datetimeFigureOut">
               <a:rPr lang="ru-RU" smtClean="0"/>
-              <a:t>19.09.2024</a:t>
+              <a:t>04.12.2025</a:t>
             </a:fld>
             <a:endParaRPr lang="ru-RU"/>
           </a:p>
@@ -3148,7 +3148,7 @@
 </file>
 
 <file path=ppt/slideLayouts/slideLayout4.xml><?xml version="1.0" encoding="utf-8"?>
-<p:sldLayout xmlns:a="http://schemas.openxmlformats.org/drawingml/2006/main" xmlns:r="http://schemas.openxmlformats.org/officeDocument/2006/relationships" xmlns:p="http://schemas.openxmlformats.org/presentationml/2006/main" type="twoObj" preserve="1">
+<p:sldLayout xmlns:a="http://schemas.openxmlformats.org/drawingml/2006/main" xmlns:r="http://schemas.openxmlformats.org/officeDocument/2006/relationships" xmlns:p="http://schemas.openxmlformats.org/presentationml/2006/main" showMasterSp="0" type="twoObj" preserve="1">
   <p:cSld name="Два объекта">
     <p:spTree>
       <p:nvGrpSpPr>
@@ -3339,7 +3339,7 @@
           <a:p>
             <a:fld id="{EF790F8C-5FB9-4EFE-BCC7-F735A3026FD8}" type="datetimeFigureOut">
               <a:rPr lang="ru-RU" smtClean="0"/>
-              <a:t>19.09.2024</a:t>
+              <a:t>04.12.2025</a:t>
             </a:fld>
             <a:endParaRPr lang="ru-RU"/>
           </a:p>
@@ -3413,7 +3413,7 @@
 </file>
 
 <file path=ppt/slideLayouts/slideLayout5.xml><?xml version="1.0" encoding="utf-8"?>
-<p:sldLayout xmlns:a="http://schemas.openxmlformats.org/drawingml/2006/main" xmlns:r="http://schemas.openxmlformats.org/officeDocument/2006/relationships" xmlns:p="http://schemas.openxmlformats.org/presentationml/2006/main" type="twoTxTwoObj" preserve="1">
+<p:sldLayout xmlns:a="http://schemas.openxmlformats.org/drawingml/2006/main" xmlns:r="http://schemas.openxmlformats.org/officeDocument/2006/relationships" xmlns:p="http://schemas.openxmlformats.org/presentationml/2006/main" showMasterSp="0" type="twoTxTwoObj" preserve="1">
   <p:cSld name="Сравнение">
     <p:spTree>
       <p:nvGrpSpPr>
@@ -3751,7 +3751,7 @@
           <a:p>
             <a:fld id="{EF790F8C-5FB9-4EFE-BCC7-F735A3026FD8}" type="datetimeFigureOut">
               <a:rPr lang="ru-RU" smtClean="0"/>
-              <a:t>19.09.2024</a:t>
+              <a:t>04.12.2025</a:t>
             </a:fld>
             <a:endParaRPr lang="ru-RU"/>
           </a:p>
@@ -3825,7 +3825,7 @@
 </file>
 
 <file path=ppt/slideLayouts/slideLayout6.xml><?xml version="1.0" encoding="utf-8"?>
-<p:sldLayout xmlns:a="http://schemas.openxmlformats.org/drawingml/2006/main" xmlns:r="http://schemas.openxmlformats.org/officeDocument/2006/relationships" xmlns:p="http://schemas.openxmlformats.org/presentationml/2006/main" type="titleOnly" preserve="1">
+<p:sldLayout xmlns:a="http://schemas.openxmlformats.org/drawingml/2006/main" xmlns:r="http://schemas.openxmlformats.org/officeDocument/2006/relationships" xmlns:p="http://schemas.openxmlformats.org/presentationml/2006/main" showMasterSp="0" type="titleOnly" preserve="1">
   <p:cSld name="Только заголовок">
     <p:spTree>
       <p:nvGrpSpPr>
@@ -3892,7 +3892,7 @@
           <a:p>
             <a:fld id="{EF790F8C-5FB9-4EFE-BCC7-F735A3026FD8}" type="datetimeFigureOut">
               <a:rPr lang="ru-RU" smtClean="0"/>
-              <a:t>19.09.2024</a:t>
+              <a:t>04.12.2025</a:t>
             </a:fld>
             <a:endParaRPr lang="ru-RU"/>
           </a:p>
@@ -3966,7 +3966,7 @@
 </file>
 
 <file path=ppt/slideLayouts/slideLayout7.xml><?xml version="1.0" encoding="utf-8"?>
-<p:sldLayout xmlns:a="http://schemas.openxmlformats.org/drawingml/2006/main" xmlns:r="http://schemas.openxmlformats.org/officeDocument/2006/relationships" xmlns:p="http://schemas.openxmlformats.org/presentationml/2006/main" type="blank" preserve="1">
+<p:sldLayout xmlns:a="http://schemas.openxmlformats.org/drawingml/2006/main" xmlns:r="http://schemas.openxmlformats.org/officeDocument/2006/relationships" xmlns:p="http://schemas.openxmlformats.org/presentationml/2006/main" showMasterSp="0" type="blank" preserve="1">
   <p:cSld name="Пустой слайд">
     <p:spTree>
       <p:nvGrpSpPr>
@@ -4005,7 +4005,7 @@
           <a:p>
             <a:fld id="{EF790F8C-5FB9-4EFE-BCC7-F735A3026FD8}" type="datetimeFigureOut">
               <a:rPr lang="ru-RU" smtClean="0"/>
-              <a:t>19.09.2024</a:t>
+              <a:t>04.12.2025</a:t>
             </a:fld>
             <a:endParaRPr lang="ru-RU"/>
           </a:p>
@@ -4079,7 +4079,7 @@
 </file>
 
 <file path=ppt/slideLayouts/slideLayout8.xml><?xml version="1.0" encoding="utf-8"?>
-<p:sldLayout xmlns:a="http://schemas.openxmlformats.org/drawingml/2006/main" xmlns:r="http://schemas.openxmlformats.org/officeDocument/2006/relationships" xmlns:p="http://schemas.openxmlformats.org/presentationml/2006/main" type="objTx" preserve="1">
+<p:sldLayout xmlns:a="http://schemas.openxmlformats.org/drawingml/2006/main" xmlns:r="http://schemas.openxmlformats.org/officeDocument/2006/relationships" xmlns:p="http://schemas.openxmlformats.org/presentationml/2006/main" showMasterSp="0" type="objTx" preserve="1">
   <p:cSld name="Объект с подписью">
     <p:spTree>
       <p:nvGrpSpPr>
@@ -4316,7 +4316,7 @@
           <a:p>
             <a:fld id="{EF790F8C-5FB9-4EFE-BCC7-F735A3026FD8}" type="datetimeFigureOut">
               <a:rPr lang="ru-RU" smtClean="0"/>
-              <a:t>19.09.2024</a:t>
+              <a:t>04.12.2025</a:t>
             </a:fld>
             <a:endParaRPr lang="ru-RU"/>
           </a:p>
@@ -4390,7 +4390,7 @@
 </file>
 
 <file path=ppt/slideLayouts/slideLayout9.xml><?xml version="1.0" encoding="utf-8"?>
-<p:sldLayout xmlns:a="http://schemas.openxmlformats.org/drawingml/2006/main" xmlns:r="http://schemas.openxmlformats.org/officeDocument/2006/relationships" xmlns:p="http://schemas.openxmlformats.org/presentationml/2006/main" type="picTx" preserve="1">
+<p:sldLayout xmlns:a="http://schemas.openxmlformats.org/drawingml/2006/main" xmlns:r="http://schemas.openxmlformats.org/officeDocument/2006/relationships" xmlns:p="http://schemas.openxmlformats.org/presentationml/2006/main" showMasterSp="0" type="picTx" preserve="1">
   <p:cSld name="Рисунок с подписью">
     <p:spTree>
       <p:nvGrpSpPr>
@@ -4604,7 +4604,7 @@
           <a:p>
             <a:fld id="{EF790F8C-5FB9-4EFE-BCC7-F735A3026FD8}" type="datetimeFigureOut">
               <a:rPr lang="ru-RU" smtClean="0"/>
-              <a:t>19.09.2024</a:t>
+              <a:t>04.12.2025</a:t>
             </a:fld>
             <a:endParaRPr lang="ru-RU"/>
           </a:p>
@@ -4845,7 +4845,7 @@
           <a:p>
             <a:fld id="{EF790F8C-5FB9-4EFE-BCC7-F735A3026FD8}" type="datetimeFigureOut">
               <a:rPr lang="ru-RU" smtClean="0"/>
-              <a:t>19.09.2024</a:t>
+              <a:t>04.12.2025</a:t>
             </a:fld>
             <a:endParaRPr lang="ru-RU"/>
           </a:p>
@@ -6007,7 +6007,7 @@
 </file>
 
 <file path=ppt/slides/slide1.xml><?xml version="1.0" encoding="utf-8"?>
-<p:sld xmlns:a="http://schemas.openxmlformats.org/drawingml/2006/main" xmlns:r="http://schemas.openxmlformats.org/officeDocument/2006/relationships" xmlns:p="http://schemas.openxmlformats.org/presentationml/2006/main">
+<p:sld xmlns:a="http://schemas.openxmlformats.org/drawingml/2006/main" xmlns:r="http://schemas.openxmlformats.org/officeDocument/2006/relationships" xmlns:p="http://schemas.openxmlformats.org/presentationml/2006/main" showMasterSp="0">
   <p:cSld>
     <p:spTree>
       <p:nvGrpSpPr>
@@ -6162,7 +6162,7 @@
 </file>
 
 <file path=ppt/slides/slide10.xml><?xml version="1.0" encoding="utf-8"?>
-<p:sld xmlns:a="http://schemas.openxmlformats.org/drawingml/2006/main" xmlns:r="http://schemas.openxmlformats.org/officeDocument/2006/relationships" xmlns:p="http://schemas.openxmlformats.org/presentationml/2006/main">
+<p:sld xmlns:a="http://schemas.openxmlformats.org/drawingml/2006/main" xmlns:r="http://schemas.openxmlformats.org/officeDocument/2006/relationships" xmlns:p="http://schemas.openxmlformats.org/presentationml/2006/main" showMasterSp="0">
   <p:cSld>
     <p:spTree>
       <p:nvGrpSpPr>
@@ -6222,7 +6222,7 @@
 </file>
 
 <file path=ppt/slides/slide11.xml><?xml version="1.0" encoding="utf-8"?>
-<p:sld xmlns:a="http://schemas.openxmlformats.org/drawingml/2006/main" xmlns:r="http://schemas.openxmlformats.org/officeDocument/2006/relationships" xmlns:p="http://schemas.openxmlformats.org/presentationml/2006/main">
+<p:sld xmlns:a="http://schemas.openxmlformats.org/drawingml/2006/main" xmlns:r="http://schemas.openxmlformats.org/officeDocument/2006/relationships" xmlns:p="http://schemas.openxmlformats.org/presentationml/2006/main" showMasterSp="0">
   <p:cSld>
     <p:spTree>
       <p:nvGrpSpPr>
@@ -6282,7 +6282,7 @@
 </file>
 
 <file path=ppt/slides/slide2.xml><?xml version="1.0" encoding="utf-8"?>
-<p:sld xmlns:a="http://schemas.openxmlformats.org/drawingml/2006/main" xmlns:r="http://schemas.openxmlformats.org/officeDocument/2006/relationships" xmlns:p="http://schemas.openxmlformats.org/presentationml/2006/main">
+<p:sld xmlns:a="http://schemas.openxmlformats.org/drawingml/2006/main" xmlns:r="http://schemas.openxmlformats.org/officeDocument/2006/relationships" xmlns:p="http://schemas.openxmlformats.org/presentationml/2006/main" showMasterSp="0">
   <p:cSld>
     <p:spTree>
       <p:nvGrpSpPr>
@@ -6342,7 +6342,7 @@
 </file>
 
 <file path=ppt/slides/slide3.xml><?xml version="1.0" encoding="utf-8"?>
-<p:sld xmlns:a="http://schemas.openxmlformats.org/drawingml/2006/main" xmlns:r="http://schemas.openxmlformats.org/officeDocument/2006/relationships" xmlns:p="http://schemas.openxmlformats.org/presentationml/2006/main">
+<p:sld xmlns:a="http://schemas.openxmlformats.org/drawingml/2006/main" xmlns:r="http://schemas.openxmlformats.org/officeDocument/2006/relationships" xmlns:p="http://schemas.openxmlformats.org/presentationml/2006/main" showMasterSp="0">
   <p:cSld>
     <p:spTree>
       <p:nvGrpSpPr>
@@ -6402,7 +6402,7 @@
 </file>
 
 <file path=ppt/slides/slide4.xml><?xml version="1.0" encoding="utf-8"?>
-<p:sld xmlns:a="http://schemas.openxmlformats.org/drawingml/2006/main" xmlns:r="http://schemas.openxmlformats.org/officeDocument/2006/relationships" xmlns:p="http://schemas.openxmlformats.org/presentationml/2006/main">
+<p:sld xmlns:a="http://schemas.openxmlformats.org/drawingml/2006/main" xmlns:r="http://schemas.openxmlformats.org/officeDocument/2006/relationships" xmlns:p="http://schemas.openxmlformats.org/presentationml/2006/main" showMasterSp="0">
   <p:cSld>
     <p:spTree>
       <p:nvGrpSpPr>
@@ -6462,7 +6462,7 @@
 </file>
 
 <file path=ppt/slides/slide5.xml><?xml version="1.0" encoding="utf-8"?>
-<p:sld xmlns:a="http://schemas.openxmlformats.org/drawingml/2006/main" xmlns:r="http://schemas.openxmlformats.org/officeDocument/2006/relationships" xmlns:p="http://schemas.openxmlformats.org/presentationml/2006/main">
+<p:sld xmlns:a="http://schemas.openxmlformats.org/drawingml/2006/main" xmlns:r="http://schemas.openxmlformats.org/officeDocument/2006/relationships" xmlns:p="http://schemas.openxmlformats.org/presentationml/2006/main" showMasterSp="0">
   <p:cSld>
     <p:spTree>
       <p:nvGrpSpPr>
@@ -6522,7 +6522,7 @@
 </file>
 
 <file path=ppt/slides/slide6.xml><?xml version="1.0" encoding="utf-8"?>
-<p:sld xmlns:a="http://schemas.openxmlformats.org/drawingml/2006/main" xmlns:r="http://schemas.openxmlformats.org/officeDocument/2006/relationships" xmlns:p="http://schemas.openxmlformats.org/presentationml/2006/main">
+<p:sld xmlns:a="http://schemas.openxmlformats.org/drawingml/2006/main" xmlns:r="http://schemas.openxmlformats.org/officeDocument/2006/relationships" xmlns:p="http://schemas.openxmlformats.org/presentationml/2006/main" showMasterSp="0">
   <p:cSld>
     <p:spTree>
       <p:nvGrpSpPr>
@@ -6582,7 +6582,7 @@
 </file>
 
 <file path=ppt/slides/slide7.xml><?xml version="1.0" encoding="utf-8"?>
-<p:sld xmlns:a="http://schemas.openxmlformats.org/drawingml/2006/main" xmlns:r="http://schemas.openxmlformats.org/officeDocument/2006/relationships" xmlns:p="http://schemas.openxmlformats.org/presentationml/2006/main">
+<p:sld xmlns:a="http://schemas.openxmlformats.org/drawingml/2006/main" xmlns:r="http://schemas.openxmlformats.org/officeDocument/2006/relationships" xmlns:p="http://schemas.openxmlformats.org/presentationml/2006/main" showMasterSp="0">
   <p:cSld>
     <p:spTree>
       <p:nvGrpSpPr>
@@ -6642,7 +6642,7 @@
 </file>
 
 <file path=ppt/slides/slide8.xml><?xml version="1.0" encoding="utf-8"?>
-<p:sld xmlns:a="http://schemas.openxmlformats.org/drawingml/2006/main" xmlns:r="http://schemas.openxmlformats.org/officeDocument/2006/relationships" xmlns:p="http://schemas.openxmlformats.org/presentationml/2006/main">
+<p:sld xmlns:a="http://schemas.openxmlformats.org/drawingml/2006/main" xmlns:r="http://schemas.openxmlformats.org/officeDocument/2006/relationships" xmlns:p="http://schemas.openxmlformats.org/presentationml/2006/main" showMasterSp="0">
   <p:cSld>
     <p:spTree>
       <p:nvGrpSpPr>
@@ -6702,7 +6702,7 @@
 </file>
 
 <file path=ppt/slides/slide9.xml><?xml version="1.0" encoding="utf-8"?>
-<p:sld xmlns:a="http://schemas.openxmlformats.org/drawingml/2006/main" xmlns:r="http://schemas.openxmlformats.org/officeDocument/2006/relationships" xmlns:p="http://schemas.openxmlformats.org/presentationml/2006/main">
+<p:sld xmlns:a="http://schemas.openxmlformats.org/drawingml/2006/main" xmlns:r="http://schemas.openxmlformats.org/officeDocument/2006/relationships" xmlns:p="http://schemas.openxmlformats.org/presentationml/2006/main" showMasterSp="0">
   <p:cSld>
     <p:spTree>
       <p:nvGrpSpPr>
